--- a/swr_matlab_param_compare/exports_channel_kinematics/paper_compare_PC_PVBC_targeted_kinematics_pc_apic.pptx
+++ b/swr_matlab_param_compare/exports_channel_kinematics/paper_compare_PC_PVBC_targeted_kinematics_pc_apic.pptx
@@ -14,6 +14,8 @@
     <p:sldId id="262" r:id="rId12"/>
     <p:sldId id="263" r:id="rId13"/>
     <p:sldId id="264" r:id="rId14"/>
+    <p:sldId id="265" r:id="rId15"/>
+    <p:sldId id="266" r:id="rId16"/>
   </p:sldIdLst>
   <p:sldSz cx="12192000" cy="6858000"/>
   <p:notesSz cx="6858000" cy="9144000"/>
@@ -3246,7 +3248,7 @@
           <a:lstStyle/>
           <a:p>
             <a:r>
-              <a:t>Channel Comparison - PC Na [PC apic]</a:t>
+              <a:t>No similar channels [PC apic]</a:t>
             </a:r>
           </a:p>
         </p:txBody>
@@ -3275,8 +3277,294 @@
         </p:blipFill>
         <p:spPr>
           <a:xfrm>
-            <a:off x="2372596" y="1825625"/>
-            <a:ext cx="7446807" cy="4351338"/>
+            <a:off x="1573372" y="1825625"/>
+            <a:ext cx="9045254" cy="4351338"/>
+          </a:xfrm>
+          <a:prstGeom prst="rect"/>
+        </p:spPr>
+      </p:pic>
+      <p:sp>
+        <p:nvSpPr>
+          <p:cNvPr id="4" name="Date"/>
+          <p:cNvSpPr>
+            <a:spLocks noGrp="1"/>
+          </p:cNvSpPr>
+          <p:nvPr>
+            <p:ph idx="10" sz="half" type="dt"/>
+          </p:nvPr>
+        </p:nvSpPr>
+        <p:spPr/>
+        <p:txBody>
+          <a:bodyPr/>
+          <a:lstStyle/>
+          <a:p>
+            <a:fld id="{5C2C3F0B-2B7F-4782-B315-33E516447C25}" type="datetimeFigureOut">
+              <a:rPr lang="en-US" smtClean="0"/>
+              <a:t>3/21/2019</a:t>
+            </a:fld>
+            <a:endParaRPr lang="en-US"/>
+          </a:p>
+        </p:txBody>
+      </p:sp>
+      <p:sp>
+        <p:nvSpPr>
+          <p:cNvPr id="5" name="Footer"/>
+          <p:cNvSpPr>
+            <a:spLocks noGrp="1"/>
+          </p:cNvSpPr>
+          <p:nvPr>
+            <p:ph idx="11" sz="quarter" type="ftr"/>
+          </p:nvPr>
+        </p:nvSpPr>
+        <p:spPr/>
+        <p:txBody>
+          <a:bodyPr/>
+          <a:lstStyle/>
+          <a:p>
+            <a:endParaRPr lang="en-US"/>
+          </a:p>
+        </p:txBody>
+      </p:sp>
+      <p:sp>
+        <p:nvSpPr>
+          <p:cNvPr id="6" name="Slide Number"/>
+          <p:cNvSpPr>
+            <a:spLocks noGrp="1"/>
+          </p:cNvSpPr>
+          <p:nvPr>
+            <p:ph idx="12" sz="quarter" type="sldNum"/>
+          </p:nvPr>
+        </p:nvSpPr>
+        <p:spPr/>
+        <p:txBody>
+          <a:bodyPr/>
+          <a:lstStyle/>
+          <a:p>
+            <a:fld id="{6FACB95C-998B-4B89-BDB5-3B69D78FCBB4}" type="slidenum">
+              <a:rPr lang="en-US" smtClean="0"/>
+              <a:t>‹#›</a:t>
+            </a:fld>
+            <a:endParaRPr lang="en-US"/>
+          </a:p>
+        </p:txBody>
+      </p:sp>
+    </p:spTree>
+    <p:extLst>
+      <p:ext uri="{BB962C8B-B14F-4D97-AF65-F5344CB8AC3E}">
+        <p14:creationId xmlns:p14="http://schemas.microsoft.com/office/powerpoint/2010/main" val="1534215338"/>
+      </p:ext>
+    </p:extLst>
+  </p:cSld>
+</p:sld>
+</file>
+
+<file path=ppt/slides/slide10.xml><?xml version="1.0" encoding="utf-8"?>
+<p:sld xmlns:a="http://schemas.openxmlformats.org/drawingml/2006/main" xmlns:p="http://schemas.openxmlformats.org/presentationml/2006/main" xmlns:r="http://schemas.openxmlformats.org/officeDocument/2006/relationships">
+  <p:cSld name="">
+    <p:spTree>
+      <p:nvGrpSpPr>
+        <p:cNvPr id="1" name=""/>
+        <p:cNvGrpSpPr/>
+        <p:nvPr/>
+      </p:nvGrpSpPr>
+      <p:grpSpPr>
+        <a:xfrm>
+          <a:off x="0" y="0"/>
+          <a:ext cx="0" cy="0"/>
+          <a:chOff x="0" y="0"/>
+          <a:chExt cx="0" cy="0"/>
+        </a:xfrm>
+      </p:grpSpPr>
+      <p:sp>
+        <p:nvSpPr>
+          <p:cNvPr id="2" name="Title"/>
+          <p:cNvSpPr>
+            <a:spLocks noGrp="1"/>
+          </p:cNvSpPr>
+          <p:nvPr>
+            <p:ph type="title"/>
+          </p:nvPr>
+        </p:nvSpPr>
+        <p:spPr/>
+        <p:txBody>
+          <a:bodyPr/>
+          <a:lstStyle/>
+          <a:p>
+            <a:r>
+              <a:t>Moderately different or different channel comparison - Bezaire PC A-type K distal [PC apic]</a:t>
+            </a:r>
+          </a:p>
+        </p:txBody>
+      </p:sp>
+      <p:pic>
+        <p:nvPicPr>
+          <p:cNvPr id="3" name="Content"/>
+          <p:cNvPicPr>
+            <a:picLocks noChangeAspect="1" noGrp="1"/>
+          </p:cNvPicPr>
+          <p:nvPr>
+            <p:ph idx="1"/>
+          </p:nvPr>
+        </p:nvPicPr>
+        <p:blipFill>
+          <a:blip r:embed="rId2">
+            <a:extLst>
+              <a:ext uri="{28A0092B-C50C-407E-A947-70E740481C1C}">
+                <a14:useLocalDpi xmlns:a14="http://schemas.microsoft.com/office/drawing/2010/main" val="0"/>
+              </a:ext>
+            </a:extLst>
+          </a:blip>
+          <a:stretch>
+            <a:fillRect/>
+          </a:stretch>
+        </p:blipFill>
+        <p:spPr>
+          <a:xfrm>
+            <a:off x="1405776" y="1825625"/>
+            <a:ext cx="9380446" cy="4351338"/>
+          </a:xfrm>
+          <a:prstGeom prst="rect"/>
+        </p:spPr>
+      </p:pic>
+      <p:sp>
+        <p:nvSpPr>
+          <p:cNvPr id="4" name="Date"/>
+          <p:cNvSpPr>
+            <a:spLocks noGrp="1"/>
+          </p:cNvSpPr>
+          <p:nvPr>
+            <p:ph idx="10" sz="half" type="dt"/>
+          </p:nvPr>
+        </p:nvSpPr>
+        <p:spPr/>
+        <p:txBody>
+          <a:bodyPr/>
+          <a:lstStyle/>
+          <a:p>
+            <a:fld id="{5C2C3F0B-2B7F-4782-B315-33E516447C25}" type="datetimeFigureOut">
+              <a:rPr lang="en-US" smtClean="0"/>
+              <a:t>3/21/2019</a:t>
+            </a:fld>
+            <a:endParaRPr lang="en-US"/>
+          </a:p>
+        </p:txBody>
+      </p:sp>
+      <p:sp>
+        <p:nvSpPr>
+          <p:cNvPr id="5" name="Footer"/>
+          <p:cNvSpPr>
+            <a:spLocks noGrp="1"/>
+          </p:cNvSpPr>
+          <p:nvPr>
+            <p:ph idx="11" sz="quarter" type="ftr"/>
+          </p:nvPr>
+        </p:nvSpPr>
+        <p:spPr/>
+        <p:txBody>
+          <a:bodyPr/>
+          <a:lstStyle/>
+          <a:p>
+            <a:endParaRPr lang="en-US"/>
+          </a:p>
+        </p:txBody>
+      </p:sp>
+      <p:sp>
+        <p:nvSpPr>
+          <p:cNvPr id="6" name="Slide Number"/>
+          <p:cNvSpPr>
+            <a:spLocks noGrp="1"/>
+          </p:cNvSpPr>
+          <p:nvPr>
+            <p:ph idx="12" sz="quarter" type="sldNum"/>
+          </p:nvPr>
+        </p:nvSpPr>
+        <p:spPr/>
+        <p:txBody>
+          <a:bodyPr/>
+          <a:lstStyle/>
+          <a:p>
+            <a:fld id="{6FACB95C-998B-4B89-BDB5-3B69D78FCBB4}" type="slidenum">
+              <a:rPr lang="en-US" smtClean="0"/>
+              <a:t>‹#›</a:t>
+            </a:fld>
+            <a:endParaRPr lang="en-US"/>
+          </a:p>
+        </p:txBody>
+      </p:sp>
+    </p:spTree>
+    <p:extLst>
+      <p:ext uri="{BB962C8B-B14F-4D97-AF65-F5344CB8AC3E}">
+        <p14:creationId xmlns:p14="http://schemas.microsoft.com/office/powerpoint/2010/main" val="1534215338"/>
+      </p:ext>
+    </p:extLst>
+  </p:cSld>
+</p:sld>
+</file>
+
+<file path=ppt/slides/slide11.xml><?xml version="1.0" encoding="utf-8"?>
+<p:sld xmlns:a="http://schemas.openxmlformats.org/drawingml/2006/main" xmlns:p="http://schemas.openxmlformats.org/presentationml/2006/main" xmlns:r="http://schemas.openxmlformats.org/officeDocument/2006/relationships">
+  <p:cSld name="">
+    <p:spTree>
+      <p:nvGrpSpPr>
+        <p:cNvPr id="1" name=""/>
+        <p:cNvGrpSpPr/>
+        <p:nvPr/>
+      </p:nvGrpSpPr>
+      <p:grpSpPr>
+        <a:xfrm>
+          <a:off x="0" y="0"/>
+          <a:ext cx="0" cy="0"/>
+          <a:chOff x="0" y="0"/>
+          <a:chExt cx="0" cy="0"/>
+        </a:xfrm>
+      </p:grpSpPr>
+      <p:sp>
+        <p:nvSpPr>
+          <p:cNvPr id="2" name="Title"/>
+          <p:cNvSpPr>
+            <a:spLocks noGrp="1"/>
+          </p:cNvSpPr>
+          <p:nvPr>
+            <p:ph type="title"/>
+          </p:nvPr>
+        </p:nvSpPr>
+        <p:spPr/>
+        <p:txBody>
+          <a:bodyPr/>
+          <a:lstStyle/>
+          <a:p>
+            <a:r>
+              <a:t>Moderately different or different channel comparison - Bezaire PC HCN [PC apic]</a:t>
+            </a:r>
+          </a:p>
+        </p:txBody>
+      </p:sp>
+      <p:pic>
+        <p:nvPicPr>
+          <p:cNvPr id="3" name="Content"/>
+          <p:cNvPicPr>
+            <a:picLocks noChangeAspect="1" noGrp="1"/>
+          </p:cNvPicPr>
+          <p:nvPr>
+            <p:ph idx="1"/>
+          </p:nvPr>
+        </p:nvPicPr>
+        <p:blipFill>
+          <a:blip r:embed="rId2">
+            <a:extLst>
+              <a:ext uri="{28A0092B-C50C-407E-A947-70E740481C1C}">
+                <a14:useLocalDpi xmlns:a14="http://schemas.microsoft.com/office/drawing/2010/main" val="0"/>
+              </a:ext>
+            </a:extLst>
+          </a:blip>
+          <a:stretch>
+            <a:fillRect/>
+          </a:stretch>
+        </p:blipFill>
+        <p:spPr>
+          <a:xfrm>
+            <a:off x="1405776" y="1825625"/>
+            <a:ext cx="9380446" cy="4351338"/>
           </a:xfrm>
           <a:prstGeom prst="rect"/>
         </p:spPr>
@@ -3389,7 +3677,7 @@
           <a:lstStyle/>
           <a:p>
             <a:r>
-              <a:t>Channel Comparison - PC KDR [PC apic]</a:t>
+              <a:t>Figure 19 - Complete targeted channel set (moderately different/different) [PC apic]</a:t>
             </a:r>
           </a:p>
         </p:txBody>
@@ -3418,8 +3706,8 @@
         </p:blipFill>
         <p:spPr>
           <a:xfrm>
-            <a:off x="2372596" y="1825625"/>
-            <a:ext cx="7446807" cy="4351338"/>
+            <a:off x="2597671" y="1825625"/>
+            <a:ext cx="6996656" cy="4351338"/>
           </a:xfrm>
           <a:prstGeom prst="rect"/>
         </p:spPr>
@@ -3532,41 +3820,33 @@
           <a:lstStyle/>
           <a:p>
             <a:r>
-              <a:t>Channel Comparison - PC A-type K [PC apic]</a:t>
-            </a:r>
-          </a:p>
-        </p:txBody>
-      </p:sp>
-      <p:pic>
-        <p:nvPicPr>
+              <a:t>Supplementary Figure 2 Caption</a:t>
+            </a:r>
+          </a:p>
+        </p:txBody>
+      </p:sp>
+      <p:sp>
+        <p:nvSpPr>
           <p:cNvPr id="3" name="Content"/>
-          <p:cNvPicPr>
-            <a:picLocks noChangeAspect="1" noGrp="1"/>
-          </p:cNvPicPr>
+          <p:cNvSpPr>
+            <a:spLocks noGrp="1"/>
+          </p:cNvSpPr>
           <p:nvPr>
             <p:ph idx="1"/>
           </p:nvPr>
-        </p:nvPicPr>
-        <p:blipFill>
-          <a:blip r:embed="rId2">
-            <a:extLst>
-              <a:ext uri="{28A0092B-C50C-407E-A947-70E740481C1C}">
-                <a14:useLocalDpi xmlns:a14="http://schemas.microsoft.com/office/drawing/2010/main" val="0"/>
-              </a:ext>
-            </a:extLst>
-          </a:blip>
-          <a:stretch>
-            <a:fillRect/>
-          </a:stretch>
-        </p:blipFill>
-        <p:spPr>
-          <a:xfrm>
-            <a:off x="2372596" y="1825625"/>
-            <a:ext cx="7446807" cy="4351338"/>
-          </a:xfrm>
-          <a:prstGeom prst="rect"/>
-        </p:spPr>
-      </p:pic>
+        </p:nvSpPr>
+        <p:spPr/>
+        <p:txBody>
+          <a:bodyPr/>
+          <a:lstStyle/>
+          <a:p>
+            <a:r>
+              <a:t>Supplementary Figure 2. Complete channel-kinematics comparison for PC apic ().
+Composite comparison of model-derived CA1 channel kinetics for the selected compartment set, after aligning all voltage-dependent curves to a shared resting membrane potential of -70 mV. Lettered panels (A., B., C., ...) each correspond to one channel family and report channel opening probability (P_open) and gate time constants (tau) across membrane voltage. Panel headers indicate the channel identity and which models are included (Canakci, BlueBrain, Bezaire, where available). Calcium-dependent channels, when present, are summarized separately as intracellular calcium concentration versus opening probability (cai vs P_open). This figure emphasizes all included channels. Residual-based BlueBrain-versus-other similarity rankings for matched compartments are based on both opening-probability and tau residuals and are provided in the associated supplementary residual tables.</a:t>
+            </a:r>
+          </a:p>
+        </p:txBody>
+      </p:sp>
       <p:sp>
         <p:nvSpPr>
           <p:cNvPr id="4" name="Date"/>
@@ -3675,7 +3955,7 @@
           <a:lstStyle/>
           <a:p>
             <a:r>
-              <a:t>Channel Comparison - BlueBrain PC T-type Ca [PC apic]</a:t>
+              <a:t>Calcium-dependent channels (cai vs probability) [PC apic]</a:t>
             </a:r>
           </a:p>
         </p:txBody>
@@ -3704,8 +3984,8 @@
         </p:blipFill>
         <p:spPr>
           <a:xfrm>
-            <a:off x="2372596" y="1825625"/>
-            <a:ext cx="7446807" cy="4351338"/>
+            <a:off x="838200" y="2163302"/>
+            <a:ext cx="10515600" cy="3675982"/>
           </a:xfrm>
           <a:prstGeom prst="rect"/>
         </p:spPr>
@@ -3818,7 +4098,7 @@
           <a:lstStyle/>
           <a:p>
             <a:r>
-              <a:t>Channel Comparison - Bezaire PC A-type K distal [PC apic]</a:t>
+              <a:t>Moderately different or different channel comparison - PC Na [PC apic]</a:t>
             </a:r>
           </a:p>
         </p:txBody>
@@ -3847,8 +4127,8 @@
         </p:blipFill>
         <p:spPr>
           <a:xfrm>
-            <a:off x="2372596" y="1825625"/>
-            <a:ext cx="7446807" cy="4351338"/>
+            <a:off x="1405776" y="1825625"/>
+            <a:ext cx="9380446" cy="4351338"/>
           </a:xfrm>
           <a:prstGeom prst="rect"/>
         </p:spPr>
@@ -3961,7 +4241,7 @@
           <a:lstStyle/>
           <a:p>
             <a:r>
-              <a:t>Channel Comparison - Bezaire PC HCN [PC apic]</a:t>
+              <a:t>Moderately different or different channel comparison - PC KDR [PC apic]</a:t>
             </a:r>
           </a:p>
         </p:txBody>
@@ -3990,8 +4270,8 @@
         </p:blipFill>
         <p:spPr>
           <a:xfrm>
-            <a:off x="2372596" y="1825625"/>
-            <a:ext cx="7446807" cy="4351338"/>
+            <a:off x="1405776" y="1825625"/>
+            <a:ext cx="9380446" cy="4351338"/>
           </a:xfrm>
           <a:prstGeom prst="rect"/>
         </p:spPr>
@@ -4104,7 +4384,7 @@
           <a:lstStyle/>
           <a:p>
             <a:r>
-              <a:t>Calcium-dependent channels (cai vs probability) [PC apic]</a:t>
+              <a:t>Moderately different or different channel comparison - PC A-type K [PC apic]</a:t>
             </a:r>
           </a:p>
         </p:txBody>
@@ -4133,8 +4413,8 @@
         </p:blipFill>
         <p:spPr>
           <a:xfrm>
-            <a:off x="838200" y="2163302"/>
-            <a:ext cx="10515600" cy="3675982"/>
+            <a:off x="1405776" y="1825625"/>
+            <a:ext cx="9380446" cy="4351338"/>
           </a:xfrm>
           <a:prstGeom prst="rect"/>
         </p:spPr>
@@ -4247,7 +4527,7 @@
           <a:lstStyle/>
           <a:p>
             <a:r>
-              <a:t>Figure 19 - Complete targeted channel set [PC apic]</a:t>
+              <a:t>Moderately different or different channel comparison - BlueBrain PC T-type Ca [PC apic]</a:t>
             </a:r>
           </a:p>
         </p:txBody>
@@ -4276,8 +4556,8 @@
         </p:blipFill>
         <p:spPr>
           <a:xfrm>
-            <a:off x="2597671" y="1825625"/>
-            <a:ext cx="6996656" cy="4351338"/>
+            <a:off x="1405776" y="1825625"/>
+            <a:ext cx="9380446" cy="4351338"/>
           </a:xfrm>
           <a:prstGeom prst="rect"/>
         </p:spPr>
@@ -4390,34 +4670,41 @@
           <a:lstStyle/>
           <a:p>
             <a:r>
-              <a:t>Supplementary Figure 2 Caption</a:t>
-            </a:r>
-          </a:p>
-        </p:txBody>
-      </p:sp>
-      <p:sp>
-        <p:nvSpPr>
+              <a:t>Moderately different or different channel comparison - Traub PC high-threshold Ca [PC apic]</a:t>
+            </a:r>
+          </a:p>
+        </p:txBody>
+      </p:sp>
+      <p:pic>
+        <p:nvPicPr>
           <p:cNvPr id="3" name="Content"/>
-          <p:cNvSpPr>
-            <a:spLocks noGrp="1"/>
-          </p:cNvSpPr>
+          <p:cNvPicPr>
+            <a:picLocks noChangeAspect="1" noGrp="1"/>
+          </p:cNvPicPr>
           <p:nvPr>
             <p:ph idx="1"/>
           </p:nvPr>
-        </p:nvSpPr>
-        <p:spPr/>
-        <p:txBody>
-          <a:bodyPr/>
-          <a:lstStyle/>
-          <a:p>
-            <a:r>
-              <a:t>Supplementary Figure 2. Complete channel-kinematics comparison for PC apic.
-Composite comparison of model-derived CA1 channel kinetics for the selected compartment set. A. Lettered panels (A., B., C., ...) each correspond to one channel family and report gate steady-state variables (x_inf), complementary closing variables (1-x_inf), time constants (tau), and channel opening probability (P_open) across membrane voltage. Panel headers indicate the channel identity and which models are included (Canakci, BlueBrain, Bezaire, where available).
-B. Calcium-dependent channels are summarized separately as calcium concentration versus opening probability (cai vs P_open), aligned to the same compartment set. Residual-based BlueBrain-versus-other similarity rankings for matched compartments are provided in the associated supplementary residual tables.</a:t>
-            </a:r>
-          </a:p>
-        </p:txBody>
-      </p:sp>
+        </p:nvPicPr>
+        <p:blipFill>
+          <a:blip r:embed="rId2">
+            <a:extLst>
+              <a:ext uri="{28A0092B-C50C-407E-A947-70E740481C1C}">
+                <a14:useLocalDpi xmlns:a14="http://schemas.microsoft.com/office/drawing/2010/main" val="0"/>
+              </a:ext>
+            </a:extLst>
+          </a:blip>
+          <a:stretch>
+            <a:fillRect/>
+          </a:stretch>
+        </p:blipFill>
+        <p:spPr>
+          <a:xfrm>
+            <a:off x="1405776" y="1825625"/>
+            <a:ext cx="9380446" cy="4351338"/>
+          </a:xfrm>
+          <a:prstGeom prst="rect"/>
+        </p:spPr>
+      </p:pic>
       <p:sp>
         <p:nvSpPr>
           <p:cNvPr id="4" name="Date"/>
